--- a/dist/초2/수학/수와계산/초2_수학_수와계산_01_세자리수_학생용.pptx
+++ b/dist/초2/수학/수와계산/초2_수학_수와계산_01_세자리수_학생용.pptx
@@ -122,13 +122,13 @@
   <p:extLst>
     <p:ext uri="{521415D9-36F7-43E2-AB2F-B90AF26B5E84}">
       <p14:sectionLst xmlns:p14="http://schemas.microsoft.com/office/powerpoint/2010/main">
-        <p14:section name="도입" id="{c40507f0-5e7f-01ec-735f-2cc9a6f24db4}">
+        <p14:section name="도입" id="{890d14f0-efb1-f091-629c-525d6dbd6233}">
           <p14:sldIdLst>
             <p14:sldId id="256"/>
             <p14:sldId id="257"/>
           </p14:sldIdLst>
         </p14:section>
-        <p14:section name="개념" id="{ae78d676-5fb5-a096-97b0-0616aa590b6d}">
+        <p14:section name="개념" id="{39e152e9-e8f3-eec1-8c82-2781528cb5b3}">
           <p14:sldIdLst>
             <p14:sldId id="258"/>
             <p14:sldId id="259"/>
@@ -139,31 +139,31 @@
             <p14:sldId id="265"/>
           </p14:sldIdLst>
         </p14:section>
-        <p14:section name="연습" id="{ad9a9d5a-4e47-453a-9603-4ee25d8152bb}">
+        <p14:section name="연습" id="{d67793b6-6ccb-d95b-a2b3-fb3e70d19859}">
           <p14:sldIdLst>
             <p14:sldId id="263"/>
             <p14:sldId id="266"/>
             <p14:sldId id="267"/>
           </p14:sldIdLst>
         </p14:section>
-        <p14:section name="개념" id="{11569c77-8e9f-3bd2-9767-2c0933e4895e}">
+        <p14:section name="개념" id="{a78a6e91-5e41-c40e-52cd-a8ab0c1d6490}">
           <p14:sldIdLst/>
         </p14:section>
-        <p14:section name="연습" id="{a35b246c-9dc6-8fcb-f028-c3802504a92e}">
+        <p14:section name="연습" id="{03dbd642-554c-bb6f-fa58-9aec82334b06}">
           <p14:sldIdLst/>
         </p14:section>
-        <p14:section name="확인" id="{d3f2fa0d-6aa1-fb95-8ebc-bf6e06709f6a}">
+        <p14:section name="확인" id="{dff907e7-e5aa-e0a5-fb99-dc57c743a404}">
           <p14:sldIdLst>
             <p14:sldId id="268"/>
             <p14:sldId id="269"/>
           </p14:sldIdLst>
         </p14:section>
-        <p14:section name="정리" id="{b3983390-d62e-3a91-712f-fdcd6b4b1d5b}">
+        <p14:section name="정리" id="{d2f3cfdf-7f39-38a6-0146-f357ccf4024e}">
           <p14:sldIdLst>
             <p14:sldId id="270"/>
           </p14:sldIdLst>
         </p14:section>
-        <p14:section name="보충" id="{2be6ff75-0d52-bf9f-0fca-bad15b137c5a}">
+        <p14:section name="보충" id="{3fe7a6d6-99f5-ee34-ae33-a2d8d3f90f00}">
           <p14:sldIdLst>
             <p14:sldId id="271"/>
           </p14:sldIdLst>
@@ -5027,7 +5027,7 @@
               <a:buNone/>
             </a:pPr>
             <a:r>
-              <a:rPr lang="ko-KR" altLang="en-US" sz="3200" b="1" dirty="0">
+              <a:rPr lang="en-US" altLang="ko-KR" sz="3200" b="1" dirty="0">
                 <a:solidFill>
                   <a:srgbClr val="1F2937"/>
                 </a:solidFill>
@@ -5076,7 +5076,7 @@
           </p:nvPr>
         </p:nvGraphicFramePr>
         <p:xfrm>
-          <a:off x="2985516" y="2373122"/>
+          <a:off x="2985516" y="2403602"/>
           <a:ext cx="6217920" cy="914400"/>
         </p:xfrm>
         <a:graphic>
@@ -5089,7 +5089,7 @@
                 <a:gridCol w="1554480"/>
                 <a:gridCol w="1554480"/>
               </a:tblGrid>
-              <a:tr h="650240">
+              <a:tr h="629920">
                 <a:tc>
                   <a:txBody>
                     <a:bodyPr/>
@@ -5363,7 +5363,7 @@
                   </a:tcPr>
                 </a:tc>
               </a:tr>
-              <a:tr h="650240">
+              <a:tr h="629920">
                 <a:tc>
                   <a:txBody>
                     <a:bodyPr/>
@@ -5637,7 +5637,7 @@
                   </a:tcPr>
                 </a:tc>
               </a:tr>
-              <a:tr h="650240">
+              <a:tr h="629920">
                 <a:tc>
                   <a:txBody>
                     <a:bodyPr/>
@@ -6221,7 +6221,7 @@
           </p:nvPr>
         </p:nvGraphicFramePr>
         <p:xfrm>
-          <a:off x="6551676" y="2842260"/>
+          <a:off x="6551676" y="2872740"/>
           <a:ext cx="4814316" cy="914400"/>
         </p:xfrm>
         <a:graphic>
@@ -6234,7 +6234,7 @@
                 <a:gridCol w="1203579"/>
                 <a:gridCol w="1203579"/>
               </a:tblGrid>
-              <a:tr h="650240">
+              <a:tr h="629920">
                 <a:tc>
                   <a:txBody>
                     <a:bodyPr/>
@@ -6508,7 +6508,7 @@
                   </a:tcPr>
                 </a:tc>
               </a:tr>
-              <a:tr h="650240">
+              <a:tr h="629920">
                 <a:tc>
                   <a:txBody>
                     <a:bodyPr/>
@@ -6782,7 +6782,7 @@
                   </a:tcPr>
                 </a:tc>
               </a:tr>
-              <a:tr h="650240">
+              <a:tr h="629920">
                 <a:tc>
                   <a:txBody>
                     <a:bodyPr/>
@@ -15298,7 +15298,7 @@
           </p:nvPr>
         </p:nvGraphicFramePr>
         <p:xfrm>
-          <a:off x="6478524" y="2915920"/>
+          <a:off x="6478524" y="2936240"/>
           <a:ext cx="4937760" cy="914400"/>
         </p:xfrm>
         <a:graphic>
@@ -15309,7 +15309,7 @@
                 <a:gridCol w="2962656"/>
                 <a:gridCol w="1975104"/>
               </a:tblGrid>
-              <a:tr h="650240">
+              <a:tr h="629920">
                 <a:tc>
                   <a:txBody>
                     <a:bodyPr/>
@@ -15447,7 +15447,7 @@
                   </a:tcPr>
                 </a:tc>
               </a:tr>
-              <a:tr h="650240">
+              <a:tr h="629920">
                 <a:tc>
                   <a:txBody>
                     <a:bodyPr/>
@@ -19296,7 +19296,7 @@
           </p:nvPr>
         </p:nvGraphicFramePr>
         <p:xfrm>
-          <a:off x="2436876" y="2042160"/>
+          <a:off x="2436876" y="2089785"/>
           <a:ext cx="7315200" cy="914400"/>
         </p:xfrm>
         <a:graphic>
@@ -19308,7 +19308,7 @@
                 <a:gridCol w="2414016"/>
                 <a:gridCol w="2414016"/>
               </a:tblGrid>
-              <a:tr h="609600">
+              <a:tr h="590550">
                 <a:tc>
                   <a:txBody>
                     <a:bodyPr/>
@@ -19514,7 +19514,7 @@
                   </a:tcPr>
                 </a:tc>
               </a:tr>
-              <a:tr h="609600">
+              <a:tr h="590550">
                 <a:tc>
                   <a:txBody>
                     <a:bodyPr/>
@@ -19720,7 +19720,7 @@
                   </a:tcPr>
                 </a:tc>
               </a:tr>
-              <a:tr h="609600">
+              <a:tr h="590550">
                 <a:tc>
                   <a:txBody>
                     <a:bodyPr/>
@@ -19926,7 +19926,7 @@
                   </a:tcPr>
                 </a:tc>
               </a:tr>
-              <a:tr h="609600">
+              <a:tr h="590550">
                 <a:tc>
                   <a:txBody>
                     <a:bodyPr/>
@@ -20132,7 +20132,7 @@
                   </a:tcPr>
                 </a:tc>
               </a:tr>
-              <a:tr h="609600">
+              <a:tr h="590550">
                 <a:tc>
                   <a:txBody>
                     <a:bodyPr/>
@@ -22570,7 +22570,7 @@
           </p:nvPr>
         </p:nvGraphicFramePr>
         <p:xfrm>
-          <a:off x="6615684" y="2477262"/>
+          <a:off x="6615684" y="2493772"/>
           <a:ext cx="4663440" cy="914400"/>
         </p:xfrm>
         <a:graphic>
@@ -22582,7 +22582,7 @@
                 <a:gridCol w="1554480"/>
                 <a:gridCol w="1554480"/>
               </a:tblGrid>
-              <a:tr h="528320">
+              <a:tr h="511810">
                 <a:tc>
                   <a:txBody>
                     <a:bodyPr/>
@@ -22788,7 +22788,7 @@
                   </a:tcPr>
                 </a:tc>
               </a:tr>
-              <a:tr h="528320">
+              <a:tr h="511810">
                 <a:tc>
                   <a:txBody>
                     <a:bodyPr/>
@@ -23235,7 +23235,7 @@
           </p:nvPr>
         </p:nvGraphicFramePr>
         <p:xfrm>
-          <a:off x="3762756" y="2773680"/>
+          <a:off x="3762756" y="2798445"/>
           <a:ext cx="4663440" cy="914400"/>
         </p:xfrm>
         <a:graphic>
@@ -23247,7 +23247,7 @@
                 <a:gridCol w="1554480"/>
                 <a:gridCol w="1554480"/>
               </a:tblGrid>
-              <a:tr h="528320">
+              <a:tr h="511810">
                 <a:tc>
                   <a:txBody>
                     <a:bodyPr/>
@@ -23453,7 +23453,7 @@
                   </a:tcPr>
                 </a:tc>
               </a:tr>
-              <a:tr h="528320">
+              <a:tr h="511810">
                 <a:tc>
                   <a:txBody>
                     <a:bodyPr/>
@@ -23659,7 +23659,7 @@
                   </a:tcPr>
                 </a:tc>
               </a:tr>
-              <a:tr h="528320">
+              <a:tr h="511810">
                 <a:tc>
                   <a:txBody>
                     <a:bodyPr/>
@@ -25558,7 +25558,7 @@
           </p:nvPr>
         </p:nvGraphicFramePr>
         <p:xfrm>
-          <a:off x="6615684" y="2477262"/>
+          <a:off x="6615684" y="2493772"/>
           <a:ext cx="4663440" cy="914400"/>
         </p:xfrm>
         <a:graphic>
@@ -25570,7 +25570,7 @@
                 <a:gridCol w="1554480"/>
                 <a:gridCol w="1554480"/>
               </a:tblGrid>
-              <a:tr h="528320">
+              <a:tr h="511810">
                 <a:tc>
                   <a:txBody>
                     <a:bodyPr/>
@@ -25776,7 +25776,7 @@
                   </a:tcPr>
                 </a:tc>
               </a:tr>
-              <a:tr h="528320">
+              <a:tr h="511810">
                 <a:tc>
                   <a:txBody>
                     <a:bodyPr/>
@@ -26682,7 +26682,7 @@
               <a:buNone/>
             </a:pPr>
             <a:r>
-              <a:rPr lang="ko-KR" altLang="en-US" sz="3200" b="1" dirty="0">
+              <a:rPr lang="en-US" altLang="ko-KR" sz="3200" b="1" dirty="0">
                 <a:solidFill>
                   <a:srgbClr val="1F2937"/>
                 </a:solidFill>
